--- a/ヤンの三日間_企画書(改良版).pptx
+++ b/ヤンの三日間_企画書(改良版).pptx
@@ -7825,6 +7825,11 @@
           <a:prstGeom prst="rect">
             <a:avLst/>
           </a:prstGeom>
+          <a:ln w="25400">
+            <a:solidFill>
+              <a:schemeClr val="bg1"/>
+            </a:solidFill>
+          </a:ln>
         </p:spPr>
       </p:pic>
     </p:spTree>
